--- a/dist/초2/사회·역사/마을과공동체/초2_사회·역사_마을과공동체_02_서로돕는마을사람들.pptx
+++ b/dist/초2/사회·역사/마을과공동체/초2_사회·역사_마을과공동체_02_서로돕는마을사람들.pptx
@@ -121,13 +121,13 @@
   <p:extLst>
     <p:ext uri="{521415D9-36F7-43E2-AB2F-B90AF26B5E84}">
       <p14:sectionLst xmlns:p14="http://schemas.microsoft.com/office/powerpoint/2010/main">
-        <p14:section name="도입" id="{73873e16-9bb4-499c-6024-35c3de7779b1}">
+        <p14:section name="도입" id="{5899dc67-276d-f64e-bca2-e605efabece1}">
           <p14:sldIdLst>
             <p14:sldId id="256"/>
             <p14:sldId id="257"/>
           </p14:sldIdLst>
         </p14:section>
-        <p14:section name="개념" id="{0372bbba-f248-8cd1-ef3d-56018ebb206b}">
+        <p14:section name="개념" id="{1f3c4a52-6321-454f-43b4-af40918b2754}">
           <p14:sldIdLst>
             <p14:sldId id="258"/>
             <p14:sldId id="259"/>
@@ -135,7 +135,7 @@
             <p14:sldId id="263"/>
           </p14:sldIdLst>
         </p14:section>
-        <p14:section name="연습" id="{96bcd820-a13e-30b9-a79b-9c66da55851b}">
+        <p14:section name="연습" id="{29c97dcd-82c0-682c-255d-9a6706f8b490}">
           <p14:sldIdLst>
             <p14:sldId id="261"/>
             <p14:sldId id="262"/>
@@ -143,25 +143,25 @@
             <p14:sldId id="265"/>
           </p14:sldIdLst>
         </p14:section>
-        <p14:section name="개념" id="{2cfc6114-575f-de3c-9673-b86c391e48a9}">
+        <p14:section name="개념" id="{f2662360-6410-9ede-ae95-8ac96689ab8a}">
           <p14:sldIdLst/>
         </p14:section>
-        <p14:section name="연습" id="{a5fc9f9c-c94b-26f2-33e3-048181ef9195}">
+        <p14:section name="연습" id="{fb576034-c748-8aa6-3bb3-4e1766d9d4da}">
           <p14:sldIdLst/>
         </p14:section>
-        <p14:section name="확인" id="{c104da0e-dd35-0184-a516-6aa520a1d207}">
+        <p14:section name="확인" id="{b6256d9a-a880-cce6-5c0f-48dd27c14cd8}">
           <p14:sldIdLst>
             <p14:sldId id="266"/>
             <p14:sldId id="267"/>
             <p14:sldId id="268"/>
           </p14:sldIdLst>
         </p14:section>
-        <p14:section name="정리" id="{1ad3b8d7-f4c7-8ac4-458c-8bcb100007be}">
+        <p14:section name="정리" id="{3cf54e99-3261-a62e-10a3-e911da065c79}">
           <p14:sldIdLst>
             <p14:sldId id="269"/>
           </p14:sldIdLst>
         </p14:section>
-        <p14:section name="보충" id="{e90814e7-a36b-e409-e107-e6385577bd8f}">
+        <p14:section name="보충" id="{48faa19a-c009-a73f-b2d9-a9bce14dbcaa}">
           <p14:sldIdLst>
             <p14:sldId id="270"/>
           </p14:sldIdLst>
